--- a/[Document]/소개운영자료/소개운영자료/[DIVE_운영방향_김경원교수].pptx
+++ b/[Document]/소개운영자료/소개운영자료/[DIVE_운영방향_김경원교수].pptx
@@ -290,7 +290,7 @@
       </p15:notesGuideLst>
     </p:ext>
     <p:ext uri="http://customooxmlschemas.google.com/">
-      <go:slidesCustomData xmlns:go="http://customooxmlschemas.google.com/" xmlns:p15="http://schemas.microsoft.com/office/powerpoint/2012/main" xmlns:p14="http://schemas.microsoft.com/office/powerpoint/2010/main" xmlns:com="http://schemas.openxmlformats.org/drawingml/2006/compatibility" xmlns:pvml="urn:schemas-microsoft-com:office:powerpoint" xmlns:v="urn:schemas-microsoft-com:vml" xmlns:o="urn:schemas-microsoft-com:office:office" xmlns:dgm="http://schemas.openxmlformats.org/drawingml/2006/diagram" xmlns:c="http://schemas.openxmlformats.org/drawingml/2006/chart" xmlns:mv="urn:schemas-microsoft-com:mac:vml" xmlns:mc="http://schemas.openxmlformats.org/markup-compatibility/2006" xmlns="" r:id="rId105" roundtripDataSignature="AMtx7miUWwlRzSp7FmXEzuK0I58SVnBqRw=="/>
+      <go:slidesCustomData xmlns="" xmlns:mc="http://schemas.openxmlformats.org/markup-compatibility/2006" xmlns:mv="urn:schemas-microsoft-com:mac:vml" xmlns:c="http://schemas.openxmlformats.org/drawingml/2006/chart" xmlns:dgm="http://schemas.openxmlformats.org/drawingml/2006/diagram" xmlns:o="urn:schemas-microsoft-com:office:office" xmlns:v="urn:schemas-microsoft-com:vml" xmlns:pvml="urn:schemas-microsoft-com:office:powerpoint" xmlns:com="http://schemas.openxmlformats.org/drawingml/2006/compatibility" xmlns:p14="http://schemas.microsoft.com/office/powerpoint/2010/main" xmlns:p15="http://schemas.microsoft.com/office/powerpoint/2012/main" xmlns:go="http://customooxmlschemas.google.com/" r:id="rId105" roundtripDataSignature="AMtx7miUWwlRzSp7FmXEzuK0I58SVnBqRw=="/>
     </p:ext>
   </p:extLst>
 </p:presentation>
@@ -390,7 +390,7 @@
           <a:p>
             <a:fld id="{0FE758C4-0839-4DFD-B23C-C4B0E1666FA8}" type="datetimeFigureOut">
               <a:rPr lang="ko-KR" altLang="en-US" smtClean="0"/>
-              <a:t>2026-04-16</a:t>
+              <a:t>2026-06-17</a:t>
             </a:fld>
             <a:endParaRPr lang="ko-KR" altLang="en-US"/>
           </a:p>
@@ -16949,7 +16949,7 @@
               <a:t>기존 기수들은 </a:t>
             </a:r>
             <a:r>
-              <a:rPr lang="en-US" altLang="ko-KR" sz="1600" b="1" i="0" u="sng" strike="noStrike" cap="none">
+              <a:rPr lang="en-US" altLang="ko-KR" sz="1600" b="1" u="sng">
                 <a:solidFill>
                   <a:srgbClr val="FF0000"/>
                 </a:solidFill>
@@ -16958,10 +16958,10 @@
                 <a:cs typeface="Calibri" panose="020F0502020204030204" pitchFamily="34" charset="0"/>
                 <a:sym typeface="Calibri"/>
               </a:rPr>
-              <a:t>1</a:t>
-            </a:r>
-            <a:r>
-              <a:rPr lang="ko-KR" altLang="en-US" sz="1600" b="1" i="0" u="sng" strike="noStrike" cap="none">
+              <a:t>Brand Diving </a:t>
+            </a:r>
+            <a:r>
+              <a:rPr lang="ko-KR" altLang="en-US" sz="1600" b="1" u="sng">
                 <a:solidFill>
                   <a:srgbClr val="FF0000"/>
                 </a:solidFill>
@@ -16970,10 +16970,10 @@
                 <a:cs typeface="Calibri" panose="020F0502020204030204" pitchFamily="34" charset="0"/>
                 <a:sym typeface="Calibri"/>
               </a:rPr>
-              <a:t>분기씩 선행하여 진행 </a:t>
-            </a:r>
-            <a:r>
-              <a:rPr lang="en-US" altLang="ko-KR" sz="1600" b="1" i="0" u="sng" strike="noStrike" cap="none">
+              <a:t>후 필요에 따라 </a:t>
+            </a:r>
+            <a:r>
+              <a:rPr lang="en-US" altLang="ko-KR" sz="1600" b="1" u="sng">
                 <a:solidFill>
                   <a:srgbClr val="FF0000"/>
                 </a:solidFill>
@@ -16982,10 +16982,10 @@
                 <a:cs typeface="Calibri" panose="020F0502020204030204" pitchFamily="34" charset="0"/>
                 <a:sym typeface="Calibri"/>
               </a:rPr>
-              <a:t>(3Q: </a:t>
-            </a:r>
-            <a:r>
-              <a:rPr lang="en-US" altLang="ko-KR" sz="1600" b="1" u="sng">
+              <a:t>Study/Project Diving </a:t>
+            </a:r>
+            <a:r>
+              <a:rPr lang="ko-KR" altLang="en-US" sz="1600" b="1" u="sng">
                 <a:solidFill>
                   <a:srgbClr val="FF0000"/>
                 </a:solidFill>
@@ -16994,55 +16994,7 @@
                 <a:cs typeface="Calibri" panose="020F0502020204030204" pitchFamily="34" charset="0"/>
                 <a:sym typeface="Calibri"/>
               </a:rPr>
-              <a:t>AI</a:t>
-            </a:r>
-            <a:r>
-              <a:rPr lang="ko-KR" altLang="en-US" sz="1600" b="1" u="sng">
-                <a:solidFill>
-                  <a:srgbClr val="FF0000"/>
-                </a:solidFill>
-                <a:latin typeface="Calibri" panose="020F0502020204030204" pitchFamily="34" charset="0"/>
-                <a:ea typeface="Calibri"/>
-                <a:cs typeface="Calibri" panose="020F0502020204030204" pitchFamily="34" charset="0"/>
-                <a:sym typeface="Calibri"/>
-              </a:rPr>
-              <a:t> </a:t>
-            </a:r>
-            <a:r>
-              <a:rPr lang="en-US" altLang="ko-KR" sz="1600" b="1" u="sng">
-                <a:solidFill>
-                  <a:srgbClr val="FF0000"/>
-                </a:solidFill>
-                <a:latin typeface="Calibri" panose="020F0502020204030204" pitchFamily="34" charset="0"/>
-                <a:ea typeface="Calibri"/>
-                <a:cs typeface="Calibri" panose="020F0502020204030204" pitchFamily="34" charset="0"/>
-                <a:sym typeface="Calibri"/>
-              </a:rPr>
-              <a:t>as</a:t>
-            </a:r>
-            <a:r>
-              <a:rPr lang="ko-KR" altLang="en-US" sz="1600" b="1" u="sng">
-                <a:solidFill>
-                  <a:srgbClr val="FF0000"/>
-                </a:solidFill>
-                <a:latin typeface="Calibri" panose="020F0502020204030204" pitchFamily="34" charset="0"/>
-                <a:ea typeface="Calibri"/>
-                <a:cs typeface="Calibri" panose="020F0502020204030204" pitchFamily="34" charset="0"/>
-                <a:sym typeface="Calibri"/>
-              </a:rPr>
-              <a:t> </a:t>
-            </a:r>
-            <a:r>
-              <a:rPr lang="en-US" altLang="ko-KR" sz="1600" b="1" u="sng">
-                <a:solidFill>
-                  <a:srgbClr val="FF0000"/>
-                </a:solidFill>
-                <a:latin typeface="Calibri" panose="020F0502020204030204" pitchFamily="34" charset="0"/>
-                <a:ea typeface="Calibri"/>
-                <a:cs typeface="Calibri" panose="020F0502020204030204" pitchFamily="34" charset="0"/>
-                <a:sym typeface="Calibri"/>
-              </a:rPr>
-              <a:t>a Service </a:t>
+              <a:t>진행</a:t>
             </a:r>
             <a:r>
               <a:rPr lang="en-US" altLang="ko-KR" sz="1600" b="1" u="sng">
@@ -17054,7 +17006,7 @@
                 <a:cs typeface="Calibri" panose="020F0502020204030204" pitchFamily="34" charset="0"/>
                 <a:sym typeface="Wingdings" panose="05000000000000000000" pitchFamily="2" charset="2"/>
               </a:rPr>
-              <a:t> 4Q~: Brand Diving) *</a:t>
+              <a:t> *</a:t>
             </a:r>
             <a:endParaRPr sz="1600" u="sng">
               <a:solidFill>
